--- a/KT/予約チケット管理/外来予約システムメール送信フロー.pptx
+++ b/KT/予約チケット管理/外来予約システムメール送信フロー.pptx
@@ -5,12 +5,13 @@
     <p:sldMasterId id="2147483648" r:id="rId1"/>
   </p:sldMasterIdLst>
   <p:notesMasterIdLst>
-    <p:notesMasterId r:id="rId5"/>
+    <p:notesMasterId r:id="rId6"/>
   </p:notesMasterIdLst>
   <p:sldIdLst>
     <p:sldId id="259" r:id="rId2"/>
     <p:sldId id="264" r:id="rId3"/>
     <p:sldId id="265" r:id="rId4"/>
+    <p:sldId id="266" r:id="rId5"/>
   </p:sldIdLst>
   <p:sldSz cx="12192000" cy="6858000"/>
   <p:notesSz cx="6858000" cy="9144000"/>
@@ -199,7 +200,7 @@
           <a:p>
             <a:fld id="{51A4CC4C-46F5-46F3-85E2-9ED9B7E1982B}" type="datetimeFigureOut">
               <a:rPr kumimoji="1" lang="ja-JP" altLang="en-US" smtClean="0"/>
-              <a:t>2026/4/16</a:t>
+              <a:t>2026/4/17</a:t>
             </a:fld>
             <a:endParaRPr kumimoji="1" lang="ja-JP" altLang="en-US"/>
           </a:p>
@@ -969,7 +970,7 @@
           <a:p>
             <a:fld id="{AB48896E-E9D5-421C-A91A-B4BACA6CE51B}" type="datetimeFigureOut">
               <a:rPr kumimoji="1" lang="ja-JP" altLang="en-US" smtClean="0"/>
-              <a:t>2026/4/16</a:t>
+              <a:t>2026/4/17</a:t>
             </a:fld>
             <a:endParaRPr kumimoji="1" lang="ja-JP" altLang="en-US"/>
           </a:p>
@@ -1199,7 +1200,7 @@
           <a:p>
             <a:fld id="{AB48896E-E9D5-421C-A91A-B4BACA6CE51B}" type="datetimeFigureOut">
               <a:rPr kumimoji="1" lang="ja-JP" altLang="en-US" smtClean="0"/>
-              <a:t>2026/4/16</a:t>
+              <a:t>2026/4/17</a:t>
             </a:fld>
             <a:endParaRPr kumimoji="1" lang="ja-JP" altLang="en-US"/>
           </a:p>
@@ -1439,7 +1440,7 @@
           <a:p>
             <a:fld id="{AB48896E-E9D5-421C-A91A-B4BACA6CE51B}" type="datetimeFigureOut">
               <a:rPr kumimoji="1" lang="ja-JP" altLang="en-US" smtClean="0"/>
-              <a:t>2026/4/16</a:t>
+              <a:t>2026/4/17</a:t>
             </a:fld>
             <a:endParaRPr kumimoji="1" lang="ja-JP" altLang="en-US"/>
           </a:p>
@@ -1669,7 +1670,7 @@
           <a:p>
             <a:fld id="{AB48896E-E9D5-421C-A91A-B4BACA6CE51B}" type="datetimeFigureOut">
               <a:rPr kumimoji="1" lang="ja-JP" altLang="en-US" smtClean="0"/>
-              <a:t>2026/4/16</a:t>
+              <a:t>2026/4/17</a:t>
             </a:fld>
             <a:endParaRPr kumimoji="1" lang="ja-JP" altLang="en-US"/>
           </a:p>
@@ -1944,7 +1945,7 @@
           <a:p>
             <a:fld id="{AB48896E-E9D5-421C-A91A-B4BACA6CE51B}" type="datetimeFigureOut">
               <a:rPr kumimoji="1" lang="ja-JP" altLang="en-US" smtClean="0"/>
-              <a:t>2026/4/16</a:t>
+              <a:t>2026/4/17</a:t>
             </a:fld>
             <a:endParaRPr kumimoji="1" lang="ja-JP" altLang="en-US"/>
           </a:p>
@@ -2273,7 +2274,7 @@
           <a:p>
             <a:fld id="{AB48896E-E9D5-421C-A91A-B4BACA6CE51B}" type="datetimeFigureOut">
               <a:rPr kumimoji="1" lang="ja-JP" altLang="en-US" smtClean="0"/>
-              <a:t>2026/4/16</a:t>
+              <a:t>2026/4/17</a:t>
             </a:fld>
             <a:endParaRPr kumimoji="1" lang="ja-JP" altLang="en-US"/>
           </a:p>
@@ -2749,7 +2750,7 @@
           <a:p>
             <a:fld id="{AB48896E-E9D5-421C-A91A-B4BACA6CE51B}" type="datetimeFigureOut">
               <a:rPr kumimoji="1" lang="ja-JP" altLang="en-US" smtClean="0"/>
-              <a:t>2026/4/16</a:t>
+              <a:t>2026/4/17</a:t>
             </a:fld>
             <a:endParaRPr kumimoji="1" lang="ja-JP" altLang="en-US"/>
           </a:p>
@@ -2890,7 +2891,7 @@
           <a:p>
             <a:fld id="{AB48896E-E9D5-421C-A91A-B4BACA6CE51B}" type="datetimeFigureOut">
               <a:rPr kumimoji="1" lang="ja-JP" altLang="en-US" smtClean="0"/>
-              <a:t>2026/4/16</a:t>
+              <a:t>2026/4/17</a:t>
             </a:fld>
             <a:endParaRPr kumimoji="1" lang="ja-JP" altLang="en-US"/>
           </a:p>
@@ -3003,7 +3004,7 @@
           <a:p>
             <a:fld id="{AB48896E-E9D5-421C-A91A-B4BACA6CE51B}" type="datetimeFigureOut">
               <a:rPr kumimoji="1" lang="ja-JP" altLang="en-US" smtClean="0"/>
-              <a:t>2026/4/16</a:t>
+              <a:t>2026/4/17</a:t>
             </a:fld>
             <a:endParaRPr kumimoji="1" lang="ja-JP" altLang="en-US"/>
           </a:p>
@@ -3346,7 +3347,7 @@
           <a:p>
             <a:fld id="{AB48896E-E9D5-421C-A91A-B4BACA6CE51B}" type="datetimeFigureOut">
               <a:rPr kumimoji="1" lang="ja-JP" altLang="en-US" smtClean="0"/>
-              <a:t>2026/4/16</a:t>
+              <a:t>2026/4/17</a:t>
             </a:fld>
             <a:endParaRPr kumimoji="1" lang="ja-JP" altLang="en-US"/>
           </a:p>
@@ -3634,7 +3635,7 @@
           <a:p>
             <a:fld id="{AB48896E-E9D5-421C-A91A-B4BACA6CE51B}" type="datetimeFigureOut">
               <a:rPr kumimoji="1" lang="ja-JP" altLang="en-US" smtClean="0"/>
-              <a:t>2026/4/16</a:t>
+              <a:t>2026/4/17</a:t>
             </a:fld>
             <a:endParaRPr kumimoji="1" lang="ja-JP" altLang="en-US"/>
           </a:p>
@@ -3907,7 +3908,7 @@
           <a:p>
             <a:fld id="{AB48896E-E9D5-421C-A91A-B4BACA6CE51B}" type="datetimeFigureOut">
               <a:rPr kumimoji="1" lang="ja-JP" altLang="en-US" smtClean="0"/>
-              <a:t>2026/4/16</a:t>
+              <a:t>2026/4/17</a:t>
             </a:fld>
             <a:endParaRPr kumimoji="1" lang="ja-JP" altLang="en-US"/>
           </a:p>
@@ -16244,6 +16245,7 @@
             </a:extLst>
           </p:cNvPr>
           <p:cNvCxnSpPr>
+            <a:cxnSpLocks/>
             <a:stCxn id="8" idx="2"/>
             <a:endCxn id="18" idx="0"/>
           </p:cNvCxnSpPr>
@@ -17505,7 +17507,7 @@
           </a:xfrm>
           <a:prstGeom prst="curvedConnector3">
             <a:avLst>
-              <a:gd name="adj1" fmla="val -1789713"/>
+              <a:gd name="adj1" fmla="val -3102169"/>
             </a:avLst>
           </a:prstGeom>
           <a:ln>
@@ -20424,6 +20426,874 @@
     <p:extLst>
       <p:ext uri="{BB962C8B-B14F-4D97-AF65-F5344CB8AC3E}">
         <p14:creationId xmlns:p14="http://schemas.microsoft.com/office/powerpoint/2010/main" val="3578619635"/>
+      </p:ext>
+    </p:extLst>
+  </p:cSld>
+  <p:clrMapOvr>
+    <a:masterClrMapping/>
+  </p:clrMapOvr>
+</p:sld>
+</file>
+
+<file path=ppt/slides/slide4.xml><?xml version="1.0" encoding="utf-8"?>
+<p:sld xmlns:a="http://schemas.openxmlformats.org/drawingml/2006/main" xmlns:r="http://schemas.openxmlformats.org/officeDocument/2006/relationships" xmlns:p="http://schemas.openxmlformats.org/presentationml/2006/main">
+  <p:cSld>
+    <p:spTree>
+      <p:nvGrpSpPr>
+        <p:cNvPr id="1" name=""/>
+        <p:cNvGrpSpPr/>
+        <p:nvPr/>
+      </p:nvGrpSpPr>
+      <p:grpSpPr>
+        <a:xfrm>
+          <a:off x="0" y="0"/>
+          <a:ext cx="0" cy="0"/>
+          <a:chOff x="0" y="0"/>
+          <a:chExt cx="0" cy="0"/>
+        </a:xfrm>
+      </p:grpSpPr>
+      <p:sp>
+        <p:nvSpPr>
+          <p:cNvPr id="4" name="テキスト ボックス 3">
+            <a:extLst>
+              <a:ext uri="{FF2B5EF4-FFF2-40B4-BE49-F238E27FC236}">
+                <a16:creationId xmlns:a16="http://schemas.microsoft.com/office/drawing/2014/main" id="{AB1FAC9D-C6CC-F000-B8FC-B01C2395708C}"/>
+              </a:ext>
+            </a:extLst>
+          </p:cNvPr>
+          <p:cNvSpPr txBox="1"/>
+          <p:nvPr/>
+        </p:nvSpPr>
+        <p:spPr>
+          <a:xfrm>
+            <a:off x="291016" y="2159830"/>
+            <a:ext cx="1092685" cy="221018"/>
+          </a:xfrm>
+          <a:prstGeom prst="rect">
+            <a:avLst/>
+          </a:prstGeom>
+          <a:solidFill>
+            <a:schemeClr val="accent3">
+              <a:lumMod val="20000"/>
+              <a:lumOff val="80000"/>
+            </a:schemeClr>
+          </a:solidFill>
+          <a:ln>
+            <a:solidFill>
+              <a:schemeClr val="tx1">
+                <a:lumMod val="50000"/>
+                <a:lumOff val="50000"/>
+              </a:schemeClr>
+            </a:solidFill>
+          </a:ln>
+        </p:spPr>
+        <p:txBody>
+          <a:bodyPr wrap="square" lIns="36000" tIns="36000" rIns="36000" bIns="0" rtlCol="0" anchor="ctr">
+            <a:spAutoFit/>
+          </a:bodyPr>
+          <a:lstStyle/>
+          <a:p>
+            <a:pPr algn="ctr"/>
+            <a:r>
+              <a:rPr kumimoji="1" lang="ja-JP" altLang="en-US" sz="1200" dirty="0"/>
+              <a:t>新着</a:t>
+            </a:r>
+          </a:p>
+        </p:txBody>
+      </p:sp>
+      <p:sp>
+        <p:nvSpPr>
+          <p:cNvPr id="7" name="テキスト ボックス 6">
+            <a:extLst>
+              <a:ext uri="{FF2B5EF4-FFF2-40B4-BE49-F238E27FC236}">
+                <a16:creationId xmlns:a16="http://schemas.microsoft.com/office/drawing/2014/main" id="{86F497CE-C67B-1E31-B2EE-E28764CEF5EC}"/>
+              </a:ext>
+            </a:extLst>
+          </p:cNvPr>
+          <p:cNvSpPr txBox="1"/>
+          <p:nvPr/>
+        </p:nvSpPr>
+        <p:spPr>
+          <a:xfrm>
+            <a:off x="1749049" y="2159830"/>
+            <a:ext cx="1092685" cy="221018"/>
+          </a:xfrm>
+          <a:prstGeom prst="rect">
+            <a:avLst/>
+          </a:prstGeom>
+          <a:solidFill>
+            <a:schemeClr val="accent3">
+              <a:lumMod val="20000"/>
+              <a:lumOff val="80000"/>
+            </a:schemeClr>
+          </a:solidFill>
+          <a:ln>
+            <a:solidFill>
+              <a:schemeClr val="tx1">
+                <a:lumMod val="50000"/>
+                <a:lumOff val="50000"/>
+              </a:schemeClr>
+            </a:solidFill>
+          </a:ln>
+        </p:spPr>
+        <p:txBody>
+          <a:bodyPr wrap="square" lIns="36000" tIns="36000" rIns="36000" bIns="0" rtlCol="0" anchor="ctr">
+            <a:spAutoFit/>
+          </a:bodyPr>
+          <a:lstStyle/>
+          <a:p>
+            <a:pPr algn="ctr"/>
+            <a:r>
+              <a:rPr lang="ja-JP" altLang="en-US" sz="1200" dirty="0"/>
+              <a:t>担当設定</a:t>
+            </a:r>
+            <a:endParaRPr kumimoji="1" lang="ja-JP" altLang="en-US" sz="1200" dirty="0"/>
+          </a:p>
+        </p:txBody>
+      </p:sp>
+      <p:sp>
+        <p:nvSpPr>
+          <p:cNvPr id="8" name="テキスト ボックス 7">
+            <a:extLst>
+              <a:ext uri="{FF2B5EF4-FFF2-40B4-BE49-F238E27FC236}">
+                <a16:creationId xmlns:a16="http://schemas.microsoft.com/office/drawing/2014/main" id="{097C90BD-7D98-992C-EB69-2E74EC8D3E8E}"/>
+              </a:ext>
+            </a:extLst>
+          </p:cNvPr>
+          <p:cNvSpPr txBox="1"/>
+          <p:nvPr/>
+        </p:nvSpPr>
+        <p:spPr>
+          <a:xfrm>
+            <a:off x="3100402" y="2159830"/>
+            <a:ext cx="1092685" cy="221018"/>
+          </a:xfrm>
+          <a:prstGeom prst="rect">
+            <a:avLst/>
+          </a:prstGeom>
+          <a:solidFill>
+            <a:schemeClr val="accent3">
+              <a:lumMod val="20000"/>
+              <a:lumOff val="80000"/>
+            </a:schemeClr>
+          </a:solidFill>
+          <a:ln>
+            <a:solidFill>
+              <a:schemeClr val="tx1">
+                <a:lumMod val="50000"/>
+                <a:lumOff val="50000"/>
+              </a:schemeClr>
+            </a:solidFill>
+          </a:ln>
+        </p:spPr>
+        <p:txBody>
+          <a:bodyPr wrap="square" lIns="36000" tIns="36000" rIns="36000" bIns="0" rtlCol="0" anchor="ctr">
+            <a:spAutoFit/>
+          </a:bodyPr>
+          <a:lstStyle/>
+          <a:p>
+            <a:pPr algn="ctr"/>
+            <a:r>
+              <a:rPr kumimoji="1" lang="ja-JP" altLang="en-US" sz="1200" dirty="0"/>
+              <a:t>メール送信</a:t>
+            </a:r>
+          </a:p>
+        </p:txBody>
+      </p:sp>
+      <p:sp>
+        <p:nvSpPr>
+          <p:cNvPr id="9" name="テキスト ボックス 8">
+            <a:extLst>
+              <a:ext uri="{FF2B5EF4-FFF2-40B4-BE49-F238E27FC236}">
+                <a16:creationId xmlns:a16="http://schemas.microsoft.com/office/drawing/2014/main" id="{C76BF239-EC71-EFC2-4A9A-1738BC5F556F}"/>
+              </a:ext>
+            </a:extLst>
+          </p:cNvPr>
+          <p:cNvSpPr txBox="1"/>
+          <p:nvPr/>
+        </p:nvSpPr>
+        <p:spPr>
+          <a:xfrm>
+            <a:off x="7626755" y="2159830"/>
+            <a:ext cx="1092685" cy="221018"/>
+          </a:xfrm>
+          <a:prstGeom prst="rect">
+            <a:avLst/>
+          </a:prstGeom>
+          <a:solidFill>
+            <a:schemeClr val="accent3">
+              <a:lumMod val="20000"/>
+              <a:lumOff val="80000"/>
+            </a:schemeClr>
+          </a:solidFill>
+          <a:ln>
+            <a:solidFill>
+              <a:schemeClr val="tx1">
+                <a:lumMod val="50000"/>
+                <a:lumOff val="50000"/>
+              </a:schemeClr>
+            </a:solidFill>
+          </a:ln>
+        </p:spPr>
+        <p:txBody>
+          <a:bodyPr wrap="square" lIns="36000" tIns="36000" rIns="36000" bIns="0" rtlCol="0" anchor="ctr">
+            <a:spAutoFit/>
+          </a:bodyPr>
+          <a:lstStyle/>
+          <a:p>
+            <a:pPr algn="ctr"/>
+            <a:r>
+              <a:rPr kumimoji="1" lang="ja-JP" altLang="en-US" sz="1200" dirty="0"/>
+              <a:t>メール既読</a:t>
+            </a:r>
+          </a:p>
+        </p:txBody>
+      </p:sp>
+      <p:sp>
+        <p:nvSpPr>
+          <p:cNvPr id="10" name="テキスト ボックス 9">
+            <a:extLst>
+              <a:ext uri="{FF2B5EF4-FFF2-40B4-BE49-F238E27FC236}">
+                <a16:creationId xmlns:a16="http://schemas.microsoft.com/office/drawing/2014/main" id="{FDF1F5B1-2EFF-3CF2-D35C-45ED0F14D253}"/>
+              </a:ext>
+            </a:extLst>
+          </p:cNvPr>
+          <p:cNvSpPr txBox="1"/>
+          <p:nvPr/>
+        </p:nvSpPr>
+        <p:spPr>
+          <a:xfrm>
+            <a:off x="7647148" y="2669137"/>
+            <a:ext cx="1092685" cy="221018"/>
+          </a:xfrm>
+          <a:prstGeom prst="rect">
+            <a:avLst/>
+          </a:prstGeom>
+          <a:solidFill>
+            <a:schemeClr val="accent3">
+              <a:lumMod val="20000"/>
+              <a:lumOff val="80000"/>
+            </a:schemeClr>
+          </a:solidFill>
+          <a:ln>
+            <a:solidFill>
+              <a:schemeClr val="tx1">
+                <a:lumMod val="50000"/>
+                <a:lumOff val="50000"/>
+              </a:schemeClr>
+            </a:solidFill>
+          </a:ln>
+        </p:spPr>
+        <p:txBody>
+          <a:bodyPr wrap="square" lIns="36000" tIns="36000" rIns="36000" bIns="0" rtlCol="0" anchor="ctr">
+            <a:spAutoFit/>
+          </a:bodyPr>
+          <a:lstStyle/>
+          <a:p>
+            <a:pPr algn="ctr"/>
+            <a:r>
+              <a:rPr kumimoji="1" lang="ja-JP" altLang="en-US" sz="1200" dirty="0"/>
+              <a:t>閲覧期限切れ</a:t>
+            </a:r>
+          </a:p>
+        </p:txBody>
+      </p:sp>
+      <p:sp>
+        <p:nvSpPr>
+          <p:cNvPr id="11" name="テキスト ボックス 10">
+            <a:extLst>
+              <a:ext uri="{FF2B5EF4-FFF2-40B4-BE49-F238E27FC236}">
+                <a16:creationId xmlns:a16="http://schemas.microsoft.com/office/drawing/2014/main" id="{407035CF-D8DC-13E2-0D90-B0F0C5443FBC}"/>
+              </a:ext>
+            </a:extLst>
+          </p:cNvPr>
+          <p:cNvSpPr txBox="1"/>
+          <p:nvPr/>
+        </p:nvSpPr>
+        <p:spPr>
+          <a:xfrm>
+            <a:off x="8998499" y="2669137"/>
+            <a:ext cx="1092685" cy="221018"/>
+          </a:xfrm>
+          <a:prstGeom prst="rect">
+            <a:avLst/>
+          </a:prstGeom>
+          <a:solidFill>
+            <a:schemeClr val="accent3">
+              <a:lumMod val="20000"/>
+              <a:lumOff val="80000"/>
+            </a:schemeClr>
+          </a:solidFill>
+          <a:ln>
+            <a:solidFill>
+              <a:schemeClr val="tx1">
+                <a:lumMod val="50000"/>
+                <a:lumOff val="50000"/>
+              </a:schemeClr>
+            </a:solidFill>
+          </a:ln>
+        </p:spPr>
+        <p:txBody>
+          <a:bodyPr wrap="square" lIns="36000" tIns="36000" rIns="36000" bIns="0" rtlCol="0" anchor="ctr">
+            <a:spAutoFit/>
+          </a:bodyPr>
+          <a:lstStyle/>
+          <a:p>
+            <a:pPr algn="ctr"/>
+            <a:r>
+              <a:rPr lang="ja-JP" altLang="en-US" sz="1200" dirty="0"/>
+              <a:t>再依頼</a:t>
+            </a:r>
+            <a:endParaRPr kumimoji="1" lang="ja-JP" altLang="en-US" sz="1200" dirty="0"/>
+          </a:p>
+        </p:txBody>
+      </p:sp>
+      <p:cxnSp>
+        <p:nvCxnSpPr>
+          <p:cNvPr id="13" name="コネクタ: カギ線 12">
+            <a:extLst>
+              <a:ext uri="{FF2B5EF4-FFF2-40B4-BE49-F238E27FC236}">
+                <a16:creationId xmlns:a16="http://schemas.microsoft.com/office/drawing/2014/main" id="{1FD89C16-9299-62E0-B66F-F453C6BE766D}"/>
+              </a:ext>
+            </a:extLst>
+          </p:cNvPr>
+          <p:cNvCxnSpPr>
+            <a:cxnSpLocks/>
+            <a:stCxn id="11" idx="3"/>
+            <a:endCxn id="8" idx="2"/>
+          </p:cNvCxnSpPr>
+          <p:nvPr/>
+        </p:nvCxnSpPr>
+        <p:spPr>
+          <a:xfrm flipH="1" flipV="1">
+            <a:off x="3646745" y="2380848"/>
+            <a:ext cx="6444439" cy="398798"/>
+          </a:xfrm>
+          <a:prstGeom prst="bentConnector4">
+            <a:avLst>
+              <a:gd name="adj1" fmla="val -3547"/>
+              <a:gd name="adj2" fmla="val -124672"/>
+            </a:avLst>
+          </a:prstGeom>
+          <a:ln>
+            <a:tailEnd type="triangle"/>
+          </a:ln>
+        </p:spPr>
+        <p:style>
+          <a:lnRef idx="2">
+            <a:schemeClr val="accent1"/>
+          </a:lnRef>
+          <a:fillRef idx="0">
+            <a:schemeClr val="accent1"/>
+          </a:fillRef>
+          <a:effectRef idx="1">
+            <a:schemeClr val="accent1"/>
+          </a:effectRef>
+          <a:fontRef idx="minor">
+            <a:schemeClr val="tx1"/>
+          </a:fontRef>
+        </p:style>
+      </p:cxnSp>
+      <p:cxnSp>
+        <p:nvCxnSpPr>
+          <p:cNvPr id="18" name="直線矢印コネクタ 17">
+            <a:extLst>
+              <a:ext uri="{FF2B5EF4-FFF2-40B4-BE49-F238E27FC236}">
+                <a16:creationId xmlns:a16="http://schemas.microsoft.com/office/drawing/2014/main" id="{9CAA4B62-1B1C-86DF-F904-D674F7341AF7}"/>
+              </a:ext>
+            </a:extLst>
+          </p:cNvPr>
+          <p:cNvCxnSpPr>
+            <a:cxnSpLocks/>
+          </p:cNvCxnSpPr>
+          <p:nvPr/>
+        </p:nvCxnSpPr>
+        <p:spPr>
+          <a:xfrm>
+            <a:off x="1383701" y="2270339"/>
+            <a:ext cx="365348" cy="0"/>
+          </a:xfrm>
+          <a:prstGeom prst="straightConnector1">
+            <a:avLst/>
+          </a:prstGeom>
+          <a:ln>
+            <a:tailEnd type="triangle"/>
+          </a:ln>
+        </p:spPr>
+        <p:style>
+          <a:lnRef idx="2">
+            <a:schemeClr val="accent1"/>
+          </a:lnRef>
+          <a:fillRef idx="0">
+            <a:schemeClr val="accent1"/>
+          </a:fillRef>
+          <a:effectRef idx="1">
+            <a:schemeClr val="accent1"/>
+          </a:effectRef>
+          <a:fontRef idx="minor">
+            <a:schemeClr val="tx1"/>
+          </a:fontRef>
+        </p:style>
+      </p:cxnSp>
+      <p:cxnSp>
+        <p:nvCxnSpPr>
+          <p:cNvPr id="19" name="直線矢印コネクタ 18">
+            <a:extLst>
+              <a:ext uri="{FF2B5EF4-FFF2-40B4-BE49-F238E27FC236}">
+                <a16:creationId xmlns:a16="http://schemas.microsoft.com/office/drawing/2014/main" id="{B0E79B9D-BCBA-44D9-DC3A-509EFF78D340}"/>
+              </a:ext>
+            </a:extLst>
+          </p:cNvPr>
+          <p:cNvCxnSpPr>
+            <a:cxnSpLocks/>
+          </p:cNvCxnSpPr>
+          <p:nvPr/>
+        </p:nvCxnSpPr>
+        <p:spPr>
+          <a:xfrm>
+            <a:off x="2841734" y="2270339"/>
+            <a:ext cx="258668" cy="0"/>
+          </a:xfrm>
+          <a:prstGeom prst="straightConnector1">
+            <a:avLst/>
+          </a:prstGeom>
+          <a:ln>
+            <a:tailEnd type="triangle"/>
+          </a:ln>
+        </p:spPr>
+        <p:style>
+          <a:lnRef idx="2">
+            <a:schemeClr val="accent1"/>
+          </a:lnRef>
+          <a:fillRef idx="0">
+            <a:schemeClr val="accent1"/>
+          </a:fillRef>
+          <a:effectRef idx="1">
+            <a:schemeClr val="accent1"/>
+          </a:effectRef>
+          <a:fontRef idx="minor">
+            <a:schemeClr val="tx1"/>
+          </a:fontRef>
+        </p:style>
+      </p:cxnSp>
+      <p:cxnSp>
+        <p:nvCxnSpPr>
+          <p:cNvPr id="22" name="直線矢印コネクタ 21">
+            <a:extLst>
+              <a:ext uri="{FF2B5EF4-FFF2-40B4-BE49-F238E27FC236}">
+                <a16:creationId xmlns:a16="http://schemas.microsoft.com/office/drawing/2014/main" id="{93432AB5-072A-2E79-71F3-A261416DE75F}"/>
+              </a:ext>
+            </a:extLst>
+          </p:cNvPr>
+          <p:cNvCxnSpPr>
+            <a:cxnSpLocks/>
+            <a:endCxn id="9" idx="1"/>
+          </p:cNvCxnSpPr>
+          <p:nvPr/>
+        </p:nvCxnSpPr>
+        <p:spPr>
+          <a:xfrm>
+            <a:off x="4193087" y="2270339"/>
+            <a:ext cx="3433668" cy="0"/>
+          </a:xfrm>
+          <a:prstGeom prst="straightConnector1">
+            <a:avLst/>
+          </a:prstGeom>
+          <a:ln>
+            <a:tailEnd type="triangle"/>
+          </a:ln>
+        </p:spPr>
+        <p:style>
+          <a:lnRef idx="2">
+            <a:schemeClr val="accent1"/>
+          </a:lnRef>
+          <a:fillRef idx="0">
+            <a:schemeClr val="accent1"/>
+          </a:fillRef>
+          <a:effectRef idx="1">
+            <a:schemeClr val="accent1"/>
+          </a:effectRef>
+          <a:fontRef idx="minor">
+            <a:schemeClr val="tx1"/>
+          </a:fontRef>
+        </p:style>
+      </p:cxnSp>
+      <p:cxnSp>
+        <p:nvCxnSpPr>
+          <p:cNvPr id="25" name="コネクタ: カギ線 24">
+            <a:extLst>
+              <a:ext uri="{FF2B5EF4-FFF2-40B4-BE49-F238E27FC236}">
+                <a16:creationId xmlns:a16="http://schemas.microsoft.com/office/drawing/2014/main" id="{7C17A502-EE7F-21A2-EB30-3C378505856C}"/>
+              </a:ext>
+            </a:extLst>
+          </p:cNvPr>
+          <p:cNvCxnSpPr>
+            <a:cxnSpLocks/>
+            <a:stCxn id="8" idx="3"/>
+            <a:endCxn id="10" idx="1"/>
+          </p:cNvCxnSpPr>
+          <p:nvPr/>
+        </p:nvCxnSpPr>
+        <p:spPr>
+          <a:xfrm>
+            <a:off x="4193087" y="2270339"/>
+            <a:ext cx="3454061" cy="509307"/>
+          </a:xfrm>
+          <a:prstGeom prst="bentConnector3">
+            <a:avLst>
+              <a:gd name="adj1" fmla="val 50000"/>
+            </a:avLst>
+          </a:prstGeom>
+          <a:ln>
+            <a:tailEnd type="triangle"/>
+          </a:ln>
+        </p:spPr>
+        <p:style>
+          <a:lnRef idx="2">
+            <a:schemeClr val="accent1"/>
+          </a:lnRef>
+          <a:fillRef idx="0">
+            <a:schemeClr val="accent1"/>
+          </a:fillRef>
+          <a:effectRef idx="1">
+            <a:schemeClr val="accent1"/>
+          </a:effectRef>
+          <a:fontRef idx="minor">
+            <a:schemeClr val="tx1"/>
+          </a:fontRef>
+        </p:style>
+      </p:cxnSp>
+      <p:sp>
+        <p:nvSpPr>
+          <p:cNvPr id="29" name="テキスト ボックス 28">
+            <a:extLst>
+              <a:ext uri="{FF2B5EF4-FFF2-40B4-BE49-F238E27FC236}">
+                <a16:creationId xmlns:a16="http://schemas.microsoft.com/office/drawing/2014/main" id="{EF808118-43BB-0962-DBFC-E0D8362C0864}"/>
+              </a:ext>
+            </a:extLst>
+          </p:cNvPr>
+          <p:cNvSpPr txBox="1"/>
+          <p:nvPr/>
+        </p:nvSpPr>
+        <p:spPr>
+          <a:xfrm>
+            <a:off x="4479694" y="1674084"/>
+            <a:ext cx="1092685" cy="221018"/>
+          </a:xfrm>
+          <a:prstGeom prst="rect">
+            <a:avLst/>
+          </a:prstGeom>
+          <a:solidFill>
+            <a:schemeClr val="accent3">
+              <a:lumMod val="20000"/>
+              <a:lumOff val="80000"/>
+            </a:schemeClr>
+          </a:solidFill>
+          <a:ln>
+            <a:solidFill>
+              <a:schemeClr val="tx1">
+                <a:lumMod val="50000"/>
+                <a:lumOff val="50000"/>
+              </a:schemeClr>
+            </a:solidFill>
+          </a:ln>
+        </p:spPr>
+        <p:txBody>
+          <a:bodyPr wrap="square" lIns="36000" tIns="36000" rIns="36000" bIns="0" rtlCol="0" anchor="ctr">
+            <a:spAutoFit/>
+          </a:bodyPr>
+          <a:lstStyle/>
+          <a:p>
+            <a:pPr algn="ctr"/>
+            <a:r>
+              <a:rPr kumimoji="1" lang="ja-JP" altLang="en-US" sz="1200" dirty="0"/>
+              <a:t>スタッフ取消</a:t>
+            </a:r>
+          </a:p>
+        </p:txBody>
+      </p:sp>
+      <p:cxnSp>
+        <p:nvCxnSpPr>
+          <p:cNvPr id="30" name="コネクタ: カギ線 29">
+            <a:extLst>
+              <a:ext uri="{FF2B5EF4-FFF2-40B4-BE49-F238E27FC236}">
+                <a16:creationId xmlns:a16="http://schemas.microsoft.com/office/drawing/2014/main" id="{384BCE43-6AC2-C6E2-B8C5-CFE294EE75DE}"/>
+              </a:ext>
+            </a:extLst>
+          </p:cNvPr>
+          <p:cNvCxnSpPr>
+            <a:cxnSpLocks/>
+            <a:stCxn id="8" idx="3"/>
+            <a:endCxn id="29" idx="1"/>
+          </p:cNvCxnSpPr>
+          <p:nvPr/>
+        </p:nvCxnSpPr>
+        <p:spPr>
+          <a:xfrm flipV="1">
+            <a:off x="4193087" y="1784593"/>
+            <a:ext cx="286607" cy="485746"/>
+          </a:xfrm>
+          <a:prstGeom prst="bentConnector3">
+            <a:avLst>
+              <a:gd name="adj1" fmla="val 50000"/>
+            </a:avLst>
+          </a:prstGeom>
+          <a:ln>
+            <a:tailEnd type="triangle"/>
+          </a:ln>
+        </p:spPr>
+        <p:style>
+          <a:lnRef idx="2">
+            <a:schemeClr val="accent1"/>
+          </a:lnRef>
+          <a:fillRef idx="0">
+            <a:schemeClr val="accent1"/>
+          </a:fillRef>
+          <a:effectRef idx="1">
+            <a:schemeClr val="accent1"/>
+          </a:effectRef>
+          <a:fontRef idx="minor">
+            <a:schemeClr val="tx1"/>
+          </a:fontRef>
+        </p:style>
+      </p:cxnSp>
+      <p:sp>
+        <p:nvSpPr>
+          <p:cNvPr id="54" name="テキスト ボックス 53">
+            <a:extLst>
+              <a:ext uri="{FF2B5EF4-FFF2-40B4-BE49-F238E27FC236}">
+                <a16:creationId xmlns:a16="http://schemas.microsoft.com/office/drawing/2014/main" id="{C7C3A0C1-F55C-9D9B-DC29-0B50F29E98C9}"/>
+              </a:ext>
+            </a:extLst>
+          </p:cNvPr>
+          <p:cNvSpPr txBox="1"/>
+          <p:nvPr/>
+        </p:nvSpPr>
+        <p:spPr>
+          <a:xfrm>
+            <a:off x="6042991" y="1674084"/>
+            <a:ext cx="1365251" cy="221018"/>
+          </a:xfrm>
+          <a:prstGeom prst="rect">
+            <a:avLst/>
+          </a:prstGeom>
+          <a:solidFill>
+            <a:schemeClr val="accent3">
+              <a:lumMod val="20000"/>
+              <a:lumOff val="80000"/>
+            </a:schemeClr>
+          </a:solidFill>
+          <a:ln>
+            <a:solidFill>
+              <a:schemeClr val="tx1">
+                <a:lumMod val="50000"/>
+                <a:lumOff val="50000"/>
+              </a:schemeClr>
+            </a:solidFill>
+          </a:ln>
+        </p:spPr>
+        <p:txBody>
+          <a:bodyPr wrap="square" lIns="36000" tIns="36000" rIns="36000" bIns="0" rtlCol="0" anchor="ctr">
+            <a:spAutoFit/>
+          </a:bodyPr>
+          <a:lstStyle/>
+          <a:p>
+            <a:pPr algn="ctr"/>
+            <a:r>
+              <a:rPr kumimoji="1" lang="ja-JP" altLang="en-US" sz="1200" dirty="0"/>
+              <a:t>スタッフ取消中止</a:t>
+            </a:r>
+          </a:p>
+        </p:txBody>
+      </p:sp>
+      <p:cxnSp>
+        <p:nvCxnSpPr>
+          <p:cNvPr id="60" name="コネクタ: カギ線 59">
+            <a:extLst>
+              <a:ext uri="{FF2B5EF4-FFF2-40B4-BE49-F238E27FC236}">
+                <a16:creationId xmlns:a16="http://schemas.microsoft.com/office/drawing/2014/main" id="{41F4671C-C607-9F77-4965-3E4ABF3E1226}"/>
+              </a:ext>
+            </a:extLst>
+          </p:cNvPr>
+          <p:cNvCxnSpPr>
+            <a:cxnSpLocks/>
+            <a:stCxn id="54" idx="3"/>
+            <a:endCxn id="9" idx="1"/>
+          </p:cNvCxnSpPr>
+          <p:nvPr/>
+        </p:nvCxnSpPr>
+        <p:spPr>
+          <a:xfrm>
+            <a:off x="7408242" y="1784593"/>
+            <a:ext cx="218513" cy="485746"/>
+          </a:xfrm>
+          <a:prstGeom prst="bentConnector3">
+            <a:avLst>
+              <a:gd name="adj1" fmla="val 50000"/>
+            </a:avLst>
+          </a:prstGeom>
+          <a:ln>
+            <a:tailEnd type="triangle"/>
+          </a:ln>
+        </p:spPr>
+        <p:style>
+          <a:lnRef idx="2">
+            <a:schemeClr val="accent1"/>
+          </a:lnRef>
+          <a:fillRef idx="0">
+            <a:schemeClr val="accent1"/>
+          </a:fillRef>
+          <a:effectRef idx="1">
+            <a:schemeClr val="accent1"/>
+          </a:effectRef>
+          <a:fontRef idx="minor">
+            <a:schemeClr val="tx1"/>
+          </a:fontRef>
+        </p:style>
+      </p:cxnSp>
+      <p:cxnSp>
+        <p:nvCxnSpPr>
+          <p:cNvPr id="67" name="直線矢印コネクタ 66">
+            <a:extLst>
+              <a:ext uri="{FF2B5EF4-FFF2-40B4-BE49-F238E27FC236}">
+                <a16:creationId xmlns:a16="http://schemas.microsoft.com/office/drawing/2014/main" id="{EEEEF11F-D100-2F1B-0C14-2F034890CB0A}"/>
+              </a:ext>
+            </a:extLst>
+          </p:cNvPr>
+          <p:cNvCxnSpPr>
+            <a:cxnSpLocks/>
+            <a:stCxn id="29" idx="3"/>
+            <a:endCxn id="54" idx="1"/>
+          </p:cNvCxnSpPr>
+          <p:nvPr/>
+        </p:nvCxnSpPr>
+        <p:spPr>
+          <a:xfrm>
+            <a:off x="5572379" y="1784593"/>
+            <a:ext cx="470612" cy="0"/>
+          </a:xfrm>
+          <a:prstGeom prst="straightConnector1">
+            <a:avLst/>
+          </a:prstGeom>
+          <a:ln>
+            <a:tailEnd type="triangle"/>
+          </a:ln>
+        </p:spPr>
+        <p:style>
+          <a:lnRef idx="2">
+            <a:schemeClr val="accent1"/>
+          </a:lnRef>
+          <a:fillRef idx="0">
+            <a:schemeClr val="accent1"/>
+          </a:fillRef>
+          <a:effectRef idx="1">
+            <a:schemeClr val="accent1"/>
+          </a:effectRef>
+          <a:fontRef idx="minor">
+            <a:schemeClr val="tx1"/>
+          </a:fontRef>
+        </p:style>
+      </p:cxnSp>
+      <p:cxnSp>
+        <p:nvCxnSpPr>
+          <p:cNvPr id="71" name="コネクタ: カギ線 70">
+            <a:extLst>
+              <a:ext uri="{FF2B5EF4-FFF2-40B4-BE49-F238E27FC236}">
+                <a16:creationId xmlns:a16="http://schemas.microsoft.com/office/drawing/2014/main" id="{B76A4A57-BA7A-DC62-2E59-BA497B95E919}"/>
+              </a:ext>
+            </a:extLst>
+          </p:cNvPr>
+          <p:cNvCxnSpPr>
+            <a:cxnSpLocks/>
+            <a:stCxn id="29" idx="3"/>
+            <a:endCxn id="7" idx="0"/>
+          </p:cNvCxnSpPr>
+          <p:nvPr/>
+        </p:nvCxnSpPr>
+        <p:spPr>
+          <a:xfrm flipH="1">
+            <a:off x="2295392" y="1784593"/>
+            <a:ext cx="3276987" cy="375237"/>
+          </a:xfrm>
+          <a:prstGeom prst="bentConnector4">
+            <a:avLst>
+              <a:gd name="adj1" fmla="val -6976"/>
+              <a:gd name="adj2" fmla="val -100440"/>
+            </a:avLst>
+          </a:prstGeom>
+          <a:ln>
+            <a:tailEnd type="triangle"/>
+          </a:ln>
+        </p:spPr>
+        <p:style>
+          <a:lnRef idx="2">
+            <a:schemeClr val="accent1"/>
+          </a:lnRef>
+          <a:fillRef idx="0">
+            <a:schemeClr val="accent1"/>
+          </a:fillRef>
+          <a:effectRef idx="1">
+            <a:schemeClr val="accent1"/>
+          </a:effectRef>
+          <a:fontRef idx="minor">
+            <a:schemeClr val="tx1"/>
+          </a:fontRef>
+        </p:style>
+      </p:cxnSp>
+      <p:sp>
+        <p:nvSpPr>
+          <p:cNvPr id="93" name="テキスト ボックス 92">
+            <a:extLst>
+              <a:ext uri="{FF2B5EF4-FFF2-40B4-BE49-F238E27FC236}">
+                <a16:creationId xmlns:a16="http://schemas.microsoft.com/office/drawing/2014/main" id="{B118F229-CDCC-A690-D8EC-88AD83106909}"/>
+              </a:ext>
+            </a:extLst>
+          </p:cNvPr>
+          <p:cNvSpPr txBox="1"/>
+          <p:nvPr/>
+        </p:nvSpPr>
+        <p:spPr>
+          <a:xfrm>
+            <a:off x="10959379" y="2380848"/>
+            <a:ext cx="1092685" cy="221018"/>
+          </a:xfrm>
+          <a:prstGeom prst="rect">
+            <a:avLst/>
+          </a:prstGeom>
+          <a:solidFill>
+            <a:schemeClr val="accent3">
+              <a:lumMod val="20000"/>
+              <a:lumOff val="80000"/>
+            </a:schemeClr>
+          </a:solidFill>
+          <a:ln>
+            <a:solidFill>
+              <a:schemeClr val="tx1">
+                <a:lumMod val="50000"/>
+                <a:lumOff val="50000"/>
+              </a:schemeClr>
+            </a:solidFill>
+          </a:ln>
+        </p:spPr>
+        <p:txBody>
+          <a:bodyPr wrap="square" lIns="36000" tIns="36000" rIns="36000" bIns="0" rtlCol="0" anchor="ctr">
+            <a:spAutoFit/>
+          </a:bodyPr>
+          <a:lstStyle/>
+          <a:p>
+            <a:pPr algn="ctr"/>
+            <a:r>
+              <a:rPr lang="ja-JP" altLang="en-US" sz="1200" dirty="0"/>
+              <a:t>自動終了</a:t>
+            </a:r>
+            <a:endParaRPr kumimoji="1" lang="ja-JP" altLang="en-US" sz="1200" dirty="0"/>
+          </a:p>
+        </p:txBody>
+      </p:sp>
+    </p:spTree>
+    <p:extLst>
+      <p:ext uri="{BB962C8B-B14F-4D97-AF65-F5344CB8AC3E}">
+        <p14:creationId xmlns:p14="http://schemas.microsoft.com/office/powerpoint/2010/main" val="1709967673"/>
       </p:ext>
     </p:extLst>
   </p:cSld>
